--- a/dist/초6/수학/연산과비례/초6_수학_연산과비례_06_백분율.pptx
+++ b/dist/초6/수학/연산과비례/초6_수학_연산과비례_06_백분율.pptx
@@ -121,13 +121,13 @@
   <p:extLst>
     <p:ext uri="{521415D9-36F7-43E2-AB2F-B90AF26B5E84}">
       <p14:sectionLst xmlns:p14="http://schemas.microsoft.com/office/powerpoint/2010/main">
-        <p14:section name="도입" id="{20c09376-162c-caeb-48b8-e448d55e18ca}">
+        <p14:section name="도입" id="{10d3d5d1-6a46-c87a-5d38-7cd6f740fe01}">
           <p14:sldIdLst>
             <p14:sldId id="256"/>
             <p14:sldId id="257"/>
           </p14:sldIdLst>
         </p14:section>
-        <p14:section name="개념" id="{cfd5eefc-b319-e540-ca0b-9c06f7fc2f0f}">
+        <p14:section name="개념" id="{bc093f28-5ebc-6812-5eb9-2e5b93805791}">
           <p14:sldIdLst>
             <p14:sldId id="258"/>
             <p14:sldId id="259"/>
@@ -135,7 +135,7 @@
             <p14:sldId id="263"/>
           </p14:sldIdLst>
         </p14:section>
-        <p14:section name="연습" id="{3423b733-dcd1-98b0-31fa-1712bf2d0ff7}">
+        <p14:section name="연습" id="{edaeedb6-409a-4f30-ba97-c56e3c080f60}">
           <p14:sldIdLst>
             <p14:sldId id="260"/>
             <p14:sldId id="261"/>
@@ -143,25 +143,25 @@
             <p14:sldId id="265"/>
           </p14:sldIdLst>
         </p14:section>
-        <p14:section name="개념" id="{1e853048-fc2b-c964-e15d-3c1195537e1f}">
+        <p14:section name="개념" id="{f75ffd6d-049c-5ddc-2c90-59ad09491fde}">
           <p14:sldIdLst/>
         </p14:section>
-        <p14:section name="연습" id="{497de682-37ff-aa24-8819-cf3159218735}">
+        <p14:section name="연습" id="{ff203e54-38ee-7e14-9860-36d9f0588c2c}">
           <p14:sldIdLst/>
         </p14:section>
-        <p14:section name="확인" id="{7556b507-5035-caee-d146-9dbd1f3fb708}">
+        <p14:section name="확인" id="{e8f13d62-8e63-6ada-f27f-48e52e735c98}">
           <p14:sldIdLst>
             <p14:sldId id="266"/>
             <p14:sldId id="267"/>
             <p14:sldId id="268"/>
           </p14:sldIdLst>
         </p14:section>
-        <p14:section name="정리" id="{a45d811d-e534-fcbf-2653-b00f011652a9}">
+        <p14:section name="정리" id="{69f3c1e7-56d9-3f80-dd9d-440b6c5b44a4}">
           <p14:sldIdLst>
             <p14:sldId id="269"/>
           </p14:sldIdLst>
         </p14:section>
-        <p14:section name="보충" id="{3a68595a-7c11-bdd3-8051-03db4ad7fcd9}">
+        <p14:section name="보충" id="{e8469cb0-d102-3340-cbd4-f6710d5e0345}">
           <p14:sldIdLst>
             <p14:sldId id="270"/>
           </p14:sldIdLst>
@@ -1677,7 +1677,7 @@
           <a:p>
             <a:r>
               <a:rPr lang="en-US" dirty="0"/>
-              <a:t>[S06 · 오개념 비교(0.8을 8 %로)]
+              <a:t>[S06 · 오개념 비교(0.8을 8 %로)]
 목적: 소수점 아래 숫자를 그대로 %로 쓰는 실수(M1)를 100칸 그림으로 반박합니다.
 시간: 약 3분
 이렇게 말해 보세요
@@ -3128,7 +3128,7 @@
                 <a:ea typeface="맑은 고딕" pitchFamily="34" charset="-122"/>
                 <a:cs typeface="맑은 고딕" pitchFamily="34" charset="-120"/>
               </a:rPr>
-              <a:t>티셔츠를 20 % 할인해서 판대요.</a:t>
+              <a:t>티셔츠를 20 % 할인해서 판대요.</a:t>
             </a:r>
             <a:endParaRPr lang="ko-KR" sz="2800" dirty="0"/>
           </a:p>
@@ -5916,7 +5916,7 @@
                 <a:ea typeface="맑은 고딕" pitchFamily="34" charset="-122"/>
                 <a:cs typeface="맑은 고딕" pitchFamily="34" charset="-120"/>
               </a:rPr>
-              <a:t>10000원짜리 필통을 30 % 할인해요.</a:t>
+              <a:t>10000원짜리 필통을 30 % 할인해요.</a:t>
             </a:r>
             <a:endParaRPr lang="ko-KR" sz="2800" dirty="0"/>
           </a:p>
@@ -6728,7 +6728,7 @@
                 <a:ea typeface="맑은 고딕" pitchFamily="34" charset="-122"/>
                 <a:cs typeface="맑은 고딕" pitchFamily="34" charset="-120"/>
               </a:rPr>
-              <a:t>35 % → 소수 □</a:t>
+              <a:t>35 % → 소수 □</a:t>
             </a:r>
             <a:endParaRPr lang="ko-KR" sz="3200" dirty="0"/>
           </a:p>
@@ -6831,7 +6831,7 @@
                 <a:ea typeface="맑은 고딕" pitchFamily="34" charset="-122"/>
                 <a:cs typeface="맑은 고딕" pitchFamily="34" charset="-120"/>
               </a:rPr>
-              <a:t>25 % 할인한 판매</a:t>
+              <a:t>25 % 할인한 판매</a:t>
             </a:r>
             <a:endParaRPr lang="ko-KR" sz="2800" dirty="0"/>
           </a:p>
@@ -7117,7 +7117,7 @@
                 <a:ea typeface="맑은 고딕" pitchFamily="34" charset="-122"/>
                 <a:cs typeface="맑은 고딕" pitchFamily="34" charset="-120"/>
               </a:rPr>
-              <a:t>① 60 %</a:t>
+              <a:t>① 60 %</a:t>
             </a:r>
             <a:endParaRPr lang="ko-KR" sz="2800" dirty="0"/>
           </a:p>
@@ -7195,7 +7195,7 @@
                 <a:ea typeface="맑은 고딕" pitchFamily="34" charset="-122"/>
                 <a:cs typeface="맑은 고딕" pitchFamily="34" charset="-120"/>
               </a:rPr>
-              <a:t>② 45 %</a:t>
+              <a:t>② 45 %</a:t>
             </a:r>
             <a:endParaRPr lang="ko-KR" sz="2800" dirty="0"/>
           </a:p>
@@ -7476,7 +7476,7 @@
                 <a:ea typeface="맑은 고딕" pitchFamily="34" charset="-122"/>
                 <a:cs typeface="맑은 고딕" pitchFamily="34" charset="-120"/>
               </a:rPr>
-              <a:t>① 6 %</a:t>
+              <a:t>① 6 %</a:t>
             </a:r>
             <a:endParaRPr lang="ko-KR" sz="2800" dirty="0"/>
           </a:p>
@@ -7793,7 +7793,7 @@
                 <a:ea typeface="맑은 고딕" pitchFamily="34" charset="-122"/>
                 <a:cs typeface="맑은 고딕" pitchFamily="34" charset="-120"/>
               </a:rPr>
-              <a:t>10000원짜리 같은 물건을 가 가게는 20 % 할인,</a:t>
+              <a:t>10000원짜리 같은 물건을 가 가게는 20 % 할인,</a:t>
             </a:r>
             <a:endParaRPr lang="ko-KR" sz="2800" dirty="0"/>
           </a:p>
@@ -8190,7 +8190,7 @@
                 <a:ea typeface="맑은 고딕" pitchFamily="34" charset="-122"/>
                 <a:cs typeface="맑은 고딕" pitchFamily="34" charset="-120"/>
               </a:rPr>
-              <a:t>× 0.8을 8 %라고 하기</a:t>
+              <a:t>× 0.8을 8 %라고 하기</a:t>
             </a:r>
             <a:endParaRPr lang="ko-KR" sz="2200" dirty="0"/>
           </a:p>
@@ -8380,7 +8380,7 @@
                 <a:ea typeface="맑은 고딕" pitchFamily="34" charset="-122"/>
                 <a:cs typeface="맑은 고딕" pitchFamily="34" charset="-120"/>
               </a:rPr>
-              <a:t>③ 8000원의 10 %는</a:t>
+              <a:t>③ 8000원의 10 %는</a:t>
             </a:r>
             <a:endParaRPr lang="ko-KR" sz="2200" dirty="0"/>
           </a:p>
@@ -12653,7 +12653,7 @@
                 <a:ea typeface="맑은 고딕" pitchFamily="34" charset="-122"/>
                 <a:cs typeface="맑은 고딕" pitchFamily="34" charset="-120"/>
               </a:rPr>
-              <a:t>37 %</a:t>
+              <a:t>37 %</a:t>
             </a:r>
             <a:endParaRPr lang="ko-KR" sz="2800" dirty="0"/>
           </a:p>
@@ -14465,7 +14465,7 @@
                 <a:ea typeface="맑은 고딕" pitchFamily="34" charset="-122"/>
                 <a:cs typeface="맑은 고딕" pitchFamily="34" charset="-120"/>
               </a:rPr>
-              <a:t>65 % → □</a:t>
+              <a:t>65 % → □</a:t>
             </a:r>
             <a:endParaRPr lang="ko-KR" sz="3200" dirty="0"/>
           </a:p>
@@ -14551,7 +14551,7 @@
                 <a:ea typeface="맑은 고딕" pitchFamily="34" charset="-122"/>
                 <a:cs typeface="맑은 고딕" pitchFamily="34" charset="-120"/>
               </a:rPr>
-              <a:t>7 % → □</a:t>
+              <a:t>7 % → □</a:t>
             </a:r>
             <a:endParaRPr lang="ko-KR" sz="3200" dirty="0"/>
           </a:p>
@@ -14850,7 +14850,7 @@
                 <a:ea typeface="맑은 고딕" pitchFamily="34" charset="-122"/>
                 <a:cs typeface="맑은 고딕" pitchFamily="34" charset="-120"/>
               </a:rPr>
-              <a:t>토끼: 8 %</a:t>
+              <a:t>토끼: 8 %</a:t>
             </a:r>
             <a:endParaRPr lang="ko-KR" sz="2200" dirty="0"/>
           </a:p>
@@ -14953,7 +14953,7 @@
                 <a:ea typeface="맑은 고딕" pitchFamily="34" charset="-122"/>
                 <a:cs typeface="맑은 고딕" pitchFamily="34" charset="-120"/>
               </a:rPr>
-              <a:t>곰: 80 %</a:t>
+              <a:t>곰: 80 %</a:t>
             </a:r>
             <a:endParaRPr lang="ko-KR" sz="2200" dirty="0"/>
           </a:p>
@@ -15009,7 +15009,7 @@
                 <a:ea typeface="맑은 고딕" pitchFamily="34" charset="-122"/>
                 <a:cs typeface="맑은 고딕" pitchFamily="34" charset="-120"/>
               </a:rPr>
-              <a:t>그래서 80 %예요.</a:t>
+              <a:t>그래서 80 %예요.</a:t>
             </a:r>
             <a:endParaRPr lang="ko-KR" sz="2800" dirty="0"/>
           </a:p>
@@ -16056,7 +16056,7 @@
                           <a:ea typeface="맑은 고딕" pitchFamily="34" charset="-122"/>
                           <a:cs typeface="맑은 고딕" pitchFamily="34" charset="-120"/>
                         </a:rPr>
-                        <a:t>48 %</a:t>
+                        <a:t>48 %</a:t>
                       </a:r>
                       <a:endParaRPr lang="en-US" sz="2800" dirty="0">
                         <a:latin typeface="맑은 고딕" charset="0"/>
@@ -16260,7 +16260,7 @@
                           <a:ea typeface="맑은 고딕" pitchFamily="34" charset="-122"/>
                           <a:cs typeface="맑은 고딕" pitchFamily="34" charset="-120"/>
                         </a:rPr>
-                        <a:t>100 %</a:t>
+                        <a:t>100 %</a:t>
                       </a:r>
                       <a:endParaRPr lang="en-US" sz="2800" dirty="0">
                         <a:latin typeface="맑은 고딕" charset="0"/>
@@ -16532,7 +16532,7 @@
                 <a:ea typeface="맑은 고딕" pitchFamily="34" charset="-122"/>
                 <a:cs typeface="맑은 고딕" pitchFamily="34" charset="-120"/>
               </a:rPr>
-              <a:t>15000원짜리 티셔츠를 20 % 할인해요.</a:t>
+              <a:t>15000원짜리 티셔츠를 20 % 할인해요.</a:t>
             </a:r>
             <a:endParaRPr lang="ko-KR" sz="2800" dirty="0"/>
           </a:p>
@@ -16848,7 +16848,7 @@
                 <a:ea typeface="맑은 고딕" pitchFamily="34" charset="-122"/>
                 <a:cs typeface="맑은 고딕" pitchFamily="34" charset="-120"/>
               </a:rPr>
-              <a:t>한 칸 1500원 (10 %)</a:t>
+              <a:t>한 칸 1500원 (10 %)</a:t>
             </a:r>
             <a:endParaRPr lang="ko-KR" sz="2200" dirty="0"/>
           </a:p>
@@ -17336,7 +17336,7 @@
                 <a:ea typeface="맑은 고딕" pitchFamily="34" charset="-122"/>
                 <a:cs typeface="맑은 고딕" pitchFamily="34" charset="-120"/>
               </a:rPr>
-              <a:t>20000원짜리 가방을 30 % 할인하면</a:t>
+              <a:t>20000원짜리 가방을 30 % 할인하면</a:t>
             </a:r>
             <a:endParaRPr lang="ko-KR" sz="2800" dirty="0"/>
           </a:p>
